--- a/вкр/практика/презентация по_преддипломной_практике_Демьянцев_Виталий_Владиславович_606_22.pptx
+++ b/вкр/практика/презентация по_преддипломной_практике_Демьянцев_Виталий_Владиславович_606_22.pptx
@@ -5,10 +5,10 @@
     <p:sldMasterId id="2147483648" r:id="rId1"/>
   </p:sldMasterIdLst>
   <p:notesMasterIdLst>
-    <p:notesMasterId r:id="rId19"/>
+    <p:notesMasterId r:id="rId20"/>
   </p:notesMasterIdLst>
   <p:handoutMasterIdLst>
-    <p:handoutMasterId r:id="rId20"/>
+    <p:handoutMasterId r:id="rId21"/>
   </p:handoutMasterIdLst>
   <p:sldIdLst>
     <p:sldId id="256" r:id="rId2"/>
@@ -23,11 +23,12 @@
     <p:sldId id="284" r:id="rId11"/>
     <p:sldId id="264" r:id="rId12"/>
     <p:sldId id="266" r:id="rId13"/>
-    <p:sldId id="290" r:id="rId14"/>
-    <p:sldId id="291" r:id="rId15"/>
-    <p:sldId id="294" r:id="rId16"/>
-    <p:sldId id="289" r:id="rId17"/>
-    <p:sldId id="280" r:id="rId18"/>
+    <p:sldId id="295" r:id="rId14"/>
+    <p:sldId id="290" r:id="rId15"/>
+    <p:sldId id="291" r:id="rId16"/>
+    <p:sldId id="294" r:id="rId17"/>
+    <p:sldId id="289" r:id="rId18"/>
+    <p:sldId id="280" r:id="rId19"/>
   </p:sldIdLst>
   <p:sldSz cx="12192000" cy="6858000"/>
   <p:notesSz cx="6858000" cy="9144000"/>
@@ -4730,88 +4731,7 @@
           <a:p>
             <a:r>
               <a:rPr lang="ru-RU" dirty="0"/>
-              <a:t>Датасеты для обучения моделей эмоций</a:t>
-            </a:r>
-          </a:p>
-        </p:txBody>
-      </p:sp>
-      <p:sp>
-        <p:nvSpPr>
-          <p:cNvPr id="3" name="Объект 2">
-            <a:extLst>
-              <a:ext uri="{FF2B5EF4-FFF2-40B4-BE49-F238E27FC236}">
-                <a16:creationId xmlns:a16="http://schemas.microsoft.com/office/drawing/2014/main" id="{A03513E5-CE54-4AB7-8986-EBEFE16031CF}"/>
-              </a:ext>
-            </a:extLst>
-          </p:cNvPr>
-          <p:cNvSpPr>
-            <a:spLocks noGrp="1"/>
-          </p:cNvSpPr>
-          <p:nvPr>
-            <p:ph idx="1"/>
-          </p:nvPr>
-        </p:nvSpPr>
-        <p:spPr>
-          <a:xfrm>
-            <a:off x="676656" y="1690688"/>
-            <a:ext cx="10677144" cy="4802187"/>
-          </a:xfrm>
-        </p:spPr>
-        <p:txBody>
-          <a:bodyPr>
-            <a:normAutofit fontScale="92500"/>
-          </a:bodyPr>
-          <a:lstStyle/>
-          <a:p>
-            <a:pPr algn="just"/>
-            <a:r>
-              <a:rPr lang="ru-RU" dirty="0"/>
-              <a:t>Для обучения и валидации моделей классификации эмоций использовались открытые датасеты FER-2013 (35 000 изображений), </a:t>
-            </a:r>
-            <a:r>
-              <a:rPr lang="ru-RU" dirty="0" err="1"/>
-              <a:t>AffectNet</a:t>
-            </a:r>
-            <a:r>
-              <a:rPr lang="ru-RU" dirty="0"/>
-              <a:t> (1 000 000+ размеченных кадров) и RAF-DB.</a:t>
-            </a:r>
-          </a:p>
-          <a:p>
-            <a:pPr algn="just"/>
-            <a:r>
-              <a:rPr lang="ru-RU" dirty="0"/>
-              <a:t>Изображения прошли предварительную подготовку: нормализация размера, конвертация в градации серого, выравнивание геометрии лица на основе ключевых точек.</a:t>
-            </a:r>
-          </a:p>
-          <a:p>
-            <a:pPr algn="just"/>
-            <a:r>
-              <a:rPr lang="ru-RU" dirty="0"/>
-              <a:t>Для повышения устойчивости модели к изменениям освещения и ракурсов применялось </a:t>
-            </a:r>
-            <a:r>
-              <a:rPr lang="ru-RU" dirty="0" err="1"/>
-              <a:t>аугментирование</a:t>
-            </a:r>
-            <a:r>
-              <a:rPr lang="ru-RU" dirty="0"/>
-              <a:t>: случайные повороты, сдвиги, изменение контрастности и добавление шума.</a:t>
-            </a:r>
-          </a:p>
-          <a:p>
-            <a:pPr algn="just"/>
-            <a:r>
-              <a:rPr lang="ru-RU" dirty="0"/>
-              <a:t>Разметка осуществлялась по 7 категориям (6 базовых эмоций + нейтрально) с перекрёстной проверкой </a:t>
-            </a:r>
-            <a:r>
-              <a:rPr lang="ru-RU" dirty="0" err="1"/>
-              <a:t>аннотаторов</a:t>
-            </a:r>
-            <a:r>
-              <a:rPr lang="ru-RU" dirty="0"/>
-              <a:t> для минимизации ошибок в обучающей выборке.</a:t>
+              <a:t>Логическая модель базы данных</a:t>
             </a:r>
           </a:p>
         </p:txBody>
@@ -4821,7 +4741,7 @@
           <p:cNvPr id="4" name="Номер слайда 3">
             <a:extLst>
               <a:ext uri="{FF2B5EF4-FFF2-40B4-BE49-F238E27FC236}">
-                <a16:creationId xmlns:a16="http://schemas.microsoft.com/office/drawing/2014/main" id="{BEFC8532-F45A-69C0-A2DF-8DF9C82CCC68}"/>
+                <a16:creationId xmlns:a16="http://schemas.microsoft.com/office/drawing/2014/main" id="{CC5BD3B4-94D6-9BF1-6ED5-AA71E42B8AE9}"/>
               </a:ext>
             </a:extLst>
           </p:cNvPr>
@@ -4845,10 +4765,46 @@
           </a:p>
         </p:txBody>
       </p:sp>
+      <p:pic>
+        <p:nvPicPr>
+          <p:cNvPr id="8" name="Рисунок 7" descr="Изображение выглядит как снимок экрана, текст, Шрифт, дизайн&#10;&#10;Автоматически созданное описание">
+            <a:extLst>
+              <a:ext uri="{FF2B5EF4-FFF2-40B4-BE49-F238E27FC236}">
+                <a16:creationId xmlns:a16="http://schemas.microsoft.com/office/drawing/2014/main" id="{96269F99-8B72-9FE2-47EC-9B6A86050459}"/>
+              </a:ext>
+            </a:extLst>
+          </p:cNvPr>
+          <p:cNvPicPr>
+            <a:picLocks noChangeAspect="1"/>
+          </p:cNvPicPr>
+          <p:nvPr/>
+        </p:nvPicPr>
+        <p:blipFill>
+          <a:blip r:embed="rId2">
+            <a:extLst>
+              <a:ext uri="{28A0092B-C50C-407E-A947-70E740481C1C}">
+                <a14:useLocalDpi xmlns:a14="http://schemas.microsoft.com/office/drawing/2010/main" val="0"/>
+              </a:ext>
+            </a:extLst>
+          </a:blip>
+          <a:stretch>
+            <a:fillRect/>
+          </a:stretch>
+        </p:blipFill>
+        <p:spPr>
+          <a:xfrm>
+            <a:off x="1818329" y="952874"/>
+            <a:ext cx="8803170" cy="5568696"/>
+          </a:xfrm>
+          <a:prstGeom prst="rect">
+            <a:avLst/>
+          </a:prstGeom>
+        </p:spPr>
+      </p:pic>
     </p:spTree>
     <p:extLst>
       <p:ext uri="{BB962C8B-B14F-4D97-AF65-F5344CB8AC3E}">
-        <p14:creationId xmlns:p14="http://schemas.microsoft.com/office/powerpoint/2010/main" val="4052091097"/>
+        <p14:creationId xmlns:p14="http://schemas.microsoft.com/office/powerpoint/2010/main" val="1063335163"/>
       </p:ext>
     </p:extLst>
   </p:cSld>
@@ -4898,7 +4854,7 @@
           <a:p>
             <a:r>
               <a:rPr lang="ru-RU" dirty="0"/>
-              <a:t>Датасеты для обучения моделей распознавания речи</a:t>
+              <a:t>Датасеты для обучения моделей эмоций</a:t>
             </a:r>
           </a:p>
         </p:txBody>
@@ -4931,51 +4887,55 @@
           </a:bodyPr>
           <a:lstStyle/>
           <a:p>
+            <a:pPr algn="just"/>
             <a:r>
               <a:rPr lang="ru-RU" dirty="0"/>
-              <a:t>Для обучения и тонкой настройки модели распознавания речи использовались многоязычные датасеты </a:t>
+              <a:t>Для обучения и валидации моделей классификации эмоций использовались открытые датасеты FER-2013 (35 000 изображений), </a:t>
             </a:r>
             <a:r>
               <a:rPr lang="ru-RU" dirty="0" err="1"/>
-              <a:t>LibriSpeech</a:t>
+              <a:t>AffectNet</a:t>
             </a:r>
             <a:r>
               <a:rPr lang="ru-RU" dirty="0"/>
-              <a:t> (1000 часов размеченной речи) и Mozilla Common Voice.</a:t>
-            </a:r>
-          </a:p>
-          <a:p>
+              <a:t> (1 000 000+ размеченных кадров) и RAF-DB.</a:t>
+            </a:r>
+          </a:p>
+          <a:p>
+            <a:pPr algn="just"/>
             <a:r>
               <a:rPr lang="ru-RU" dirty="0"/>
-              <a:t>Аудиозаписи прошли предобработку: приведение к единой частоте дискретизации 16 кГц, нормализация громкости, фильтрация низкочастотных шумов и удаление сегментов с молчанием.</a:t>
-            </a:r>
-          </a:p>
-          <a:p>
+              <a:t>Изображения прошли предварительную подготовку: нормализация размера, конвертация в градации серого, выравнивание геометрии лица на основе ключевых точек.</a:t>
+            </a:r>
+          </a:p>
+          <a:p>
+            <a:pPr algn="just"/>
             <a:r>
               <a:rPr lang="ru-RU" dirty="0"/>
-              <a:t>Для адаптации под русскоязычные HR-сценарии применялась дополнительная разметка профессиональной терминологии и коррекция фонетических особенностей речи.</a:t>
-            </a:r>
-          </a:p>
-          <a:p>
+              <a:t>Для повышения устойчивости модели к изменениям освещения и ракурсов применялось </a:t>
+            </a:r>
+            <a:r>
+              <a:rPr lang="ru-RU" dirty="0" err="1"/>
+              <a:t>аугментирование</a:t>
+            </a:r>
             <a:r>
               <a:rPr lang="ru-RU" dirty="0"/>
-              <a:t>Датасеты разделены на обучающую, </a:t>
+              <a:t>: случайные повороты, сдвиги, изменение контрастности и добавление шума.</a:t>
+            </a:r>
+          </a:p>
+          <a:p>
+            <a:pPr algn="just"/>
+            <a:r>
+              <a:rPr lang="ru-RU" dirty="0"/>
+              <a:t>Разметка осуществлялась по 7 категориям (6 базовых эмоций + нейтрально) с перекрёстной проверкой </a:t>
             </a:r>
             <a:r>
               <a:rPr lang="ru-RU" dirty="0" err="1"/>
-              <a:t>валидационную</a:t>
+              <a:t>аннотаторов</a:t>
             </a:r>
             <a:r>
               <a:rPr lang="ru-RU" dirty="0"/>
-              <a:t> и тестовую выборки для объективной оценки метрики WER (Word </a:t>
-            </a:r>
-            <a:r>
-              <a:rPr lang="ru-RU" dirty="0" err="1"/>
-              <a:t>Error</a:t>
-            </a:r>
-            <a:r>
-              <a:rPr lang="ru-RU" dirty="0"/>
-              <a:t> Rate) и предотвращения переобучения модели.</a:t>
+              <a:t> для минимизации ошибок в обучающей выборке.</a:t>
             </a:r>
           </a:p>
         </p:txBody>
@@ -4985,7 +4945,7 @@
           <p:cNvPr id="4" name="Номер слайда 3">
             <a:extLst>
               <a:ext uri="{FF2B5EF4-FFF2-40B4-BE49-F238E27FC236}">
-                <a16:creationId xmlns:a16="http://schemas.microsoft.com/office/drawing/2014/main" id="{876FA01B-9A52-F89F-A16D-335822DC56DD}"/>
+                <a16:creationId xmlns:a16="http://schemas.microsoft.com/office/drawing/2014/main" id="{BEFC8532-F45A-69C0-A2DF-8DF9C82CCC68}"/>
               </a:ext>
             </a:extLst>
           </p:cNvPr>
@@ -5002,17 +4962,17 @@
           <a:lstStyle/>
           <a:p>
             <a:fld id="{5F9DB6E4-81A8-48FA-A111-413E3E85E768}" type="slidenum">
-              <a:rPr lang="ru-RU"/>
+              <a:rPr lang="ru-RU" smtClean="0"/>
               <a:t>14</a:t>
             </a:fld>
-            <a:endParaRPr lang="ru-RU" dirty="0"/>
+            <a:endParaRPr lang="ru-RU"/>
           </a:p>
         </p:txBody>
       </p:sp>
     </p:spTree>
     <p:extLst>
       <p:ext uri="{BB962C8B-B14F-4D97-AF65-F5344CB8AC3E}">
-        <p14:creationId xmlns:p14="http://schemas.microsoft.com/office/powerpoint/2010/main" val="2492345886"/>
+        <p14:creationId xmlns:p14="http://schemas.microsoft.com/office/powerpoint/2010/main" val="4052091097"/>
       </p:ext>
     </p:extLst>
   </p:cSld>
@@ -5044,7 +5004,7 @@
           <p:cNvPr id="2" name="Заголовок 1">
             <a:extLst>
               <a:ext uri="{FF2B5EF4-FFF2-40B4-BE49-F238E27FC236}">
-                <a16:creationId xmlns:a16="http://schemas.microsoft.com/office/drawing/2014/main" id="{6AE47E73-D877-4497-A30F-9D6C2A470274}"/>
+                <a16:creationId xmlns:a16="http://schemas.microsoft.com/office/drawing/2014/main" id="{554A4237-7384-4D65-B40A-9F7802E2C2BF}"/>
               </a:ext>
             </a:extLst>
           </p:cNvPr>
@@ -5055,67 +5015,101 @@
             <p:ph type="title"/>
           </p:nvPr>
         </p:nvSpPr>
-        <p:spPr>
-          <a:xfrm>
-            <a:off x="426720" y="502887"/>
-            <a:ext cx="4806346" cy="1325563"/>
+        <p:spPr/>
+        <p:txBody>
+          <a:bodyPr/>
+          <a:lstStyle/>
+          <a:p>
+            <a:r>
+              <a:rPr lang="ru-RU" dirty="0"/>
+              <a:t>Датасеты для обучения моделей распознавания речи</a:t>
+            </a:r>
+          </a:p>
+        </p:txBody>
+      </p:sp>
+      <p:sp>
+        <p:nvSpPr>
+          <p:cNvPr id="3" name="Объект 2">
+            <a:extLst>
+              <a:ext uri="{FF2B5EF4-FFF2-40B4-BE49-F238E27FC236}">
+                <a16:creationId xmlns:a16="http://schemas.microsoft.com/office/drawing/2014/main" id="{A03513E5-CE54-4AB7-8986-EBEFE16031CF}"/>
+              </a:ext>
+            </a:extLst>
+          </p:cNvPr>
+          <p:cNvSpPr>
+            <a:spLocks noGrp="1"/>
+          </p:cNvSpPr>
+          <p:nvPr>
+            <p:ph idx="1"/>
+          </p:nvPr>
+        </p:nvSpPr>
+        <p:spPr>
+          <a:xfrm>
+            <a:off x="676656" y="1690688"/>
+            <a:ext cx="10677144" cy="4802187"/>
           </a:xfrm>
         </p:spPr>
         <p:txBody>
           <a:bodyPr>
-            <a:normAutofit fontScale="90000"/>
+            <a:normAutofit fontScale="92500"/>
           </a:bodyPr>
           <a:lstStyle/>
           <a:p>
             <a:r>
               <a:rPr lang="ru-RU" dirty="0"/>
-              <a:t>Алгоритмическое обеспечение. Алгоритм работы программы</a:t>
-            </a:r>
-          </a:p>
-        </p:txBody>
-      </p:sp>
-      <p:pic>
-        <p:nvPicPr>
-          <p:cNvPr id="14" name="Рисунок 13" descr="Изображение выглядит как текст, снимок экрана, Шрифт, круг&#10;&#10;Автоматически созданное описание">
-            <a:extLst>
-              <a:ext uri="{FF2B5EF4-FFF2-40B4-BE49-F238E27FC236}">
-                <a16:creationId xmlns:a16="http://schemas.microsoft.com/office/drawing/2014/main" id="{64B798B7-B817-76FD-B22A-243899D54FCF}"/>
-              </a:ext>
-            </a:extLst>
-          </p:cNvPr>
-          <p:cNvPicPr>
-            <a:picLocks noChangeAspect="1"/>
-          </p:cNvPicPr>
-          <p:nvPr/>
-        </p:nvPicPr>
-        <p:blipFill>
-          <a:blip r:embed="rId2">
-            <a:extLst>
-              <a:ext uri="{28A0092B-C50C-407E-A947-70E740481C1C}">
-                <a14:useLocalDpi xmlns:a14="http://schemas.microsoft.com/office/drawing/2010/main" val="0"/>
-              </a:ext>
-            </a:extLst>
-          </a:blip>
-          <a:stretch>
-            <a:fillRect/>
-          </a:stretch>
-        </p:blipFill>
-        <p:spPr>
-          <a:xfrm>
-            <a:off x="3888898" y="93216"/>
-            <a:ext cx="7577678" cy="6452798"/>
-          </a:xfrm>
-          <a:prstGeom prst="rect">
-            <a:avLst/>
-          </a:prstGeom>
-        </p:spPr>
-      </p:pic>
-      <p:sp>
-        <p:nvSpPr>
-          <p:cNvPr id="3" name="Номер слайда 2">
-            <a:extLst>
-              <a:ext uri="{FF2B5EF4-FFF2-40B4-BE49-F238E27FC236}">
-                <a16:creationId xmlns:a16="http://schemas.microsoft.com/office/drawing/2014/main" id="{7F01DB20-C1C1-2C1C-3C13-1BAAD2296A64}"/>
+              <a:t>Для обучения и тонкой настройки модели распознавания речи использовались многоязычные датасеты </a:t>
+            </a:r>
+            <a:r>
+              <a:rPr lang="ru-RU" dirty="0" err="1"/>
+              <a:t>LibriSpeech</a:t>
+            </a:r>
+            <a:r>
+              <a:rPr lang="ru-RU" dirty="0"/>
+              <a:t> (1000 часов размеченной речи) и Mozilla Common Voice.</a:t>
+            </a:r>
+          </a:p>
+          <a:p>
+            <a:r>
+              <a:rPr lang="ru-RU" dirty="0"/>
+              <a:t>Аудиозаписи прошли предобработку: приведение к единой частоте дискретизации 16 кГц, нормализация громкости, фильтрация низкочастотных шумов и удаление сегментов с молчанием.</a:t>
+            </a:r>
+          </a:p>
+          <a:p>
+            <a:r>
+              <a:rPr lang="ru-RU" dirty="0"/>
+              <a:t>Для адаптации под русскоязычные HR-сценарии применялась дополнительная разметка профессиональной терминологии и коррекция фонетических особенностей речи.</a:t>
+            </a:r>
+          </a:p>
+          <a:p>
+            <a:r>
+              <a:rPr lang="ru-RU" dirty="0"/>
+              <a:t>Датасеты разделены на обучающую, </a:t>
+            </a:r>
+            <a:r>
+              <a:rPr lang="ru-RU" dirty="0" err="1"/>
+              <a:t>валидационную</a:t>
+            </a:r>
+            <a:r>
+              <a:rPr lang="ru-RU" dirty="0"/>
+              <a:t> и тестовую выборки для объективной оценки метрики WER (Word </a:t>
+            </a:r>
+            <a:r>
+              <a:rPr lang="ru-RU" dirty="0" err="1"/>
+              <a:t>Error</a:t>
+            </a:r>
+            <a:r>
+              <a:rPr lang="ru-RU" dirty="0"/>
+              <a:t> Rate) и предотвращения переобучения модели.</a:t>
+            </a:r>
+          </a:p>
+        </p:txBody>
+      </p:sp>
+      <p:sp>
+        <p:nvSpPr>
+          <p:cNvPr id="4" name="Номер слайда 3">
+            <a:extLst>
+              <a:ext uri="{FF2B5EF4-FFF2-40B4-BE49-F238E27FC236}">
+                <a16:creationId xmlns:a16="http://schemas.microsoft.com/office/drawing/2014/main" id="{876FA01B-9A52-F89F-A16D-335822DC56DD}"/>
               </a:ext>
             </a:extLst>
           </p:cNvPr>
@@ -5132,7 +5126,7 @@
           <a:lstStyle/>
           <a:p>
             <a:fld id="{5F9DB6E4-81A8-48FA-A111-413E3E85E768}" type="slidenum">
-              <a:rPr lang="ru-RU" smtClean="0"/>
+              <a:rPr lang="ru-RU"/>
               <a:t>15</a:t>
             </a:fld>
             <a:endParaRPr lang="ru-RU" dirty="0"/>
@@ -5142,7 +5136,7 @@
     </p:spTree>
     <p:extLst>
       <p:ext uri="{BB962C8B-B14F-4D97-AF65-F5344CB8AC3E}">
-        <p14:creationId xmlns:p14="http://schemas.microsoft.com/office/powerpoint/2010/main" val="634590208"/>
+        <p14:creationId xmlns:p14="http://schemas.microsoft.com/office/powerpoint/2010/main" val="2492345886"/>
       </p:ext>
     </p:extLst>
   </p:cSld>
@@ -5169,12 +5163,47 @@
           <a:chExt cx="0" cy="0"/>
         </a:xfrm>
       </p:grpSpPr>
+      <p:sp>
+        <p:nvSpPr>
+          <p:cNvPr id="2" name="Заголовок 1">
+            <a:extLst>
+              <a:ext uri="{FF2B5EF4-FFF2-40B4-BE49-F238E27FC236}">
+                <a16:creationId xmlns:a16="http://schemas.microsoft.com/office/drawing/2014/main" id="{6AE47E73-D877-4497-A30F-9D6C2A470274}"/>
+              </a:ext>
+            </a:extLst>
+          </p:cNvPr>
+          <p:cNvSpPr>
+            <a:spLocks noGrp="1"/>
+          </p:cNvSpPr>
+          <p:nvPr>
+            <p:ph type="title"/>
+          </p:nvPr>
+        </p:nvSpPr>
+        <p:spPr>
+          <a:xfrm>
+            <a:off x="426720" y="502887"/>
+            <a:ext cx="4806346" cy="1325563"/>
+          </a:xfrm>
+        </p:spPr>
+        <p:txBody>
+          <a:bodyPr>
+            <a:normAutofit fontScale="90000"/>
+          </a:bodyPr>
+          <a:lstStyle/>
+          <a:p>
+            <a:r>
+              <a:rPr lang="ru-RU" dirty="0"/>
+              <a:t>Алгоритмическое обеспечение. Алгоритм работы программы</a:t>
+            </a:r>
+          </a:p>
+        </p:txBody>
+      </p:sp>
       <p:pic>
         <p:nvPicPr>
-          <p:cNvPr id="5" name="Рисунок 4">
-            <a:extLst>
-              <a:ext uri="{FF2B5EF4-FFF2-40B4-BE49-F238E27FC236}">
-                <a16:creationId xmlns:a16="http://schemas.microsoft.com/office/drawing/2014/main" id="{3A240AF3-3AA3-3709-E167-D4F5A9CA4FDE}"/>
+          <p:cNvPr id="14" name="Рисунок 13" descr="Изображение выглядит как текст, снимок экрана, Шрифт, круг&#10;&#10;Автоматически созданное описание">
+            <a:extLst>
+              <a:ext uri="{FF2B5EF4-FFF2-40B4-BE49-F238E27FC236}">
+                <a16:creationId xmlns:a16="http://schemas.microsoft.com/office/drawing/2014/main" id="{64B798B7-B817-76FD-B22A-243899D54FCF}"/>
               </a:ext>
             </a:extLst>
           </p:cNvPr>
@@ -5184,15 +5213,21 @@
           <p:nvPr/>
         </p:nvPicPr>
         <p:blipFill>
-          <a:blip r:embed="rId2"/>
+          <a:blip r:embed="rId2">
+            <a:extLst>
+              <a:ext uri="{28A0092B-C50C-407E-A947-70E740481C1C}">
+                <a14:useLocalDpi xmlns:a14="http://schemas.microsoft.com/office/drawing/2010/main" val="0"/>
+              </a:ext>
+            </a:extLst>
+          </a:blip>
           <a:stretch>
             <a:fillRect/>
           </a:stretch>
         </p:blipFill>
         <p:spPr>
           <a:xfrm>
-            <a:off x="603504" y="1570743"/>
-            <a:ext cx="10222992" cy="5224572"/>
+            <a:off x="3888898" y="93216"/>
+            <a:ext cx="7577678" cy="6452798"/>
           </a:xfrm>
           <a:prstGeom prst="rect">
             <a:avLst/>
@@ -5201,43 +5236,10 @@
       </p:pic>
       <p:sp>
         <p:nvSpPr>
-          <p:cNvPr id="9" name="Заголовок 8">
-            <a:extLst>
-              <a:ext uri="{FF2B5EF4-FFF2-40B4-BE49-F238E27FC236}">
-                <a16:creationId xmlns:a16="http://schemas.microsoft.com/office/drawing/2014/main" id="{97468337-8816-F43C-CDDA-7015138208A6}"/>
-              </a:ext>
-            </a:extLst>
-          </p:cNvPr>
-          <p:cNvSpPr>
-            <a:spLocks noGrp="1"/>
-          </p:cNvSpPr>
-          <p:nvPr>
-            <p:ph type="title"/>
-          </p:nvPr>
-        </p:nvSpPr>
-        <p:spPr>
-          <a:xfrm>
-            <a:off x="603504" y="93216"/>
-            <a:ext cx="10515600" cy="1325563"/>
-          </a:xfrm>
-        </p:spPr>
-        <p:txBody>
-          <a:bodyPr/>
-          <a:lstStyle/>
-          <a:p>
-            <a:r>
-              <a:rPr lang="ru-RU" dirty="0"/>
-              <a:t>Интерфейс системы</a:t>
-            </a:r>
-          </a:p>
-        </p:txBody>
-      </p:sp>
-      <p:sp>
-        <p:nvSpPr>
-          <p:cNvPr id="2" name="Номер слайда 1">
-            <a:extLst>
-              <a:ext uri="{FF2B5EF4-FFF2-40B4-BE49-F238E27FC236}">
-                <a16:creationId xmlns:a16="http://schemas.microsoft.com/office/drawing/2014/main" id="{2DA7844C-4845-591E-A755-516346161CEC}"/>
+          <p:cNvPr id="3" name="Номер слайда 2">
+            <a:extLst>
+              <a:ext uri="{FF2B5EF4-FFF2-40B4-BE49-F238E27FC236}">
+                <a16:creationId xmlns:a16="http://schemas.microsoft.com/office/drawing/2014/main" id="{7F01DB20-C1C1-2C1C-3C13-1BAAD2296A64}"/>
               </a:ext>
             </a:extLst>
           </p:cNvPr>
@@ -5257,14 +5259,14 @@
               <a:rPr lang="ru-RU" smtClean="0"/>
               <a:t>16</a:t>
             </a:fld>
-            <a:endParaRPr lang="ru-RU"/>
+            <a:endParaRPr lang="ru-RU" dirty="0"/>
           </a:p>
         </p:txBody>
       </p:sp>
     </p:spTree>
     <p:extLst>
       <p:ext uri="{BB962C8B-B14F-4D97-AF65-F5344CB8AC3E}">
-        <p14:creationId xmlns:p14="http://schemas.microsoft.com/office/powerpoint/2010/main" val="3695925043"/>
+        <p14:creationId xmlns:p14="http://schemas.microsoft.com/office/powerpoint/2010/main" val="634590208"/>
       </p:ext>
     </p:extLst>
   </p:cSld>
@@ -5291,6 +5293,128 @@
           <a:chExt cx="0" cy="0"/>
         </a:xfrm>
       </p:grpSpPr>
+      <p:pic>
+        <p:nvPicPr>
+          <p:cNvPr id="5" name="Рисунок 4">
+            <a:extLst>
+              <a:ext uri="{FF2B5EF4-FFF2-40B4-BE49-F238E27FC236}">
+                <a16:creationId xmlns:a16="http://schemas.microsoft.com/office/drawing/2014/main" id="{3A240AF3-3AA3-3709-E167-D4F5A9CA4FDE}"/>
+              </a:ext>
+            </a:extLst>
+          </p:cNvPr>
+          <p:cNvPicPr>
+            <a:picLocks noChangeAspect="1"/>
+          </p:cNvPicPr>
+          <p:nvPr/>
+        </p:nvPicPr>
+        <p:blipFill>
+          <a:blip r:embed="rId2"/>
+          <a:stretch>
+            <a:fillRect/>
+          </a:stretch>
+        </p:blipFill>
+        <p:spPr>
+          <a:xfrm>
+            <a:off x="603504" y="1570743"/>
+            <a:ext cx="10222992" cy="5224572"/>
+          </a:xfrm>
+          <a:prstGeom prst="rect">
+            <a:avLst/>
+          </a:prstGeom>
+        </p:spPr>
+      </p:pic>
+      <p:sp>
+        <p:nvSpPr>
+          <p:cNvPr id="9" name="Заголовок 8">
+            <a:extLst>
+              <a:ext uri="{FF2B5EF4-FFF2-40B4-BE49-F238E27FC236}">
+                <a16:creationId xmlns:a16="http://schemas.microsoft.com/office/drawing/2014/main" id="{97468337-8816-F43C-CDDA-7015138208A6}"/>
+              </a:ext>
+            </a:extLst>
+          </p:cNvPr>
+          <p:cNvSpPr>
+            <a:spLocks noGrp="1"/>
+          </p:cNvSpPr>
+          <p:nvPr>
+            <p:ph type="title"/>
+          </p:nvPr>
+        </p:nvSpPr>
+        <p:spPr>
+          <a:xfrm>
+            <a:off x="603504" y="93216"/>
+            <a:ext cx="10515600" cy="1325563"/>
+          </a:xfrm>
+        </p:spPr>
+        <p:txBody>
+          <a:bodyPr/>
+          <a:lstStyle/>
+          <a:p>
+            <a:r>
+              <a:rPr lang="ru-RU" dirty="0"/>
+              <a:t>Интерфейс системы</a:t>
+            </a:r>
+          </a:p>
+        </p:txBody>
+      </p:sp>
+      <p:sp>
+        <p:nvSpPr>
+          <p:cNvPr id="2" name="Номер слайда 1">
+            <a:extLst>
+              <a:ext uri="{FF2B5EF4-FFF2-40B4-BE49-F238E27FC236}">
+                <a16:creationId xmlns:a16="http://schemas.microsoft.com/office/drawing/2014/main" id="{2DA7844C-4845-591E-A755-516346161CEC}"/>
+              </a:ext>
+            </a:extLst>
+          </p:cNvPr>
+          <p:cNvSpPr>
+            <a:spLocks noGrp="1"/>
+          </p:cNvSpPr>
+          <p:nvPr>
+            <p:ph type="sldNum" sz="quarter" idx="12"/>
+          </p:nvPr>
+        </p:nvSpPr>
+        <p:spPr/>
+        <p:txBody>
+          <a:bodyPr/>
+          <a:lstStyle/>
+          <a:p>
+            <a:fld id="{5F9DB6E4-81A8-48FA-A111-413E3E85E768}" type="slidenum">
+              <a:rPr lang="ru-RU" smtClean="0"/>
+              <a:t>17</a:t>
+            </a:fld>
+            <a:endParaRPr lang="ru-RU"/>
+          </a:p>
+        </p:txBody>
+      </p:sp>
+    </p:spTree>
+    <p:extLst>
+      <p:ext uri="{BB962C8B-B14F-4D97-AF65-F5344CB8AC3E}">
+        <p14:creationId xmlns:p14="http://schemas.microsoft.com/office/powerpoint/2010/main" val="3695925043"/>
+      </p:ext>
+    </p:extLst>
+  </p:cSld>
+  <p:clrMapOvr>
+    <a:masterClrMapping/>
+  </p:clrMapOvr>
+</p:sld>
+</file>
+
+<file path=ppt/slides/slide18.xml><?xml version="1.0" encoding="utf-8"?>
+<p:sld xmlns:a="http://schemas.openxmlformats.org/drawingml/2006/main" xmlns:r="http://schemas.openxmlformats.org/officeDocument/2006/relationships" xmlns:p="http://schemas.openxmlformats.org/presentationml/2006/main">
+  <p:cSld>
+    <p:spTree>
+      <p:nvGrpSpPr>
+        <p:cNvPr id="1" name=""/>
+        <p:cNvGrpSpPr/>
+        <p:nvPr/>
+      </p:nvGrpSpPr>
+      <p:grpSpPr>
+        <a:xfrm>
+          <a:off x="0" y="0"/>
+          <a:ext cx="0" cy="0"/>
+          <a:chOff x="0" y="0"/>
+          <a:chExt cx="0" cy="0"/>
+        </a:xfrm>
+      </p:grpSpPr>
       <p:sp>
         <p:nvSpPr>
           <p:cNvPr id="2" name="Заголовок 1">
@@ -5540,7 +5664,7 @@
           <a:p>
             <a:fld id="{5F9DB6E4-81A8-48FA-A111-413E3E85E768}" type="slidenum">
               <a:rPr lang="ru-RU" smtClean="0"/>
-              <a:t>17</a:t>
+              <a:t>18</a:t>
             </a:fld>
             <a:endParaRPr lang="ru-RU"/>
           </a:p>
